--- a/artifacts/speaking-portfolio-expanded/decks/failure-improvement-40min-handout.pptx
+++ b/artifacts/speaking-portfolio-expanded/decks/failure-improvement-40min-handout.pptx
@@ -887,6 +887,52 @@
                 <a:ea typeface="Arial"/>
                 <a:cs typeface="Arial"/>
               </a:rPr>
+              <a:t xml:space="preserve">This is where Adaptive, agentic apps hands work back. A runtime agent earns its own authority there; the compiled procedure it keeps reusing gets evaluated here, offline, like any other change.</a:t>
+            </a:r>
+            <a:endParaRPr lang="en-US" sz="1200"/>
+          </a:p>
+          <a:p>
+            <a:pPr marL="0" indent="0">
+              <a:lnSpc>
+                <a:spcPts val="1560"/>
+              </a:lnSpc>
+              <a:spcAft>
+                <a:spcPts val="0"/>
+              </a:spcAft>
+              <a:buNone/>
+            </a:pPr>
+            <a:r>
+              <a:rPr lang="en-US" sz="1200" b="0">
+                <a:solidFill>
+                  <a:srgbClr val="202b33"/>
+                </a:solidFill>
+                <a:latin typeface="Arial"/>
+                <a:ea typeface="Arial"/>
+                <a:cs typeface="Arial"/>
+              </a:rPr>
+              <a:t xml:space="preserve"/>
+            </a:r>
+            <a:endParaRPr lang="en-US" sz="1200"/>
+          </a:p>
+          <a:p>
+            <a:pPr marL="0" indent="0">
+              <a:lnSpc>
+                <a:spcPts val="1560"/>
+              </a:lnSpc>
+              <a:spcAft>
+                <a:spcPts val="0"/>
+              </a:spcAft>
+              <a:buNone/>
+            </a:pPr>
+            <a:r>
+              <a:rPr lang="en-US" sz="1200" b="0">
+                <a:solidFill>
+                  <a:srgbClr val="202b33"/>
+                </a:solidFill>
+                <a:latin typeface="Arial"/>
+                <a:ea typeface="Arial"/>
+                <a:cs typeface="Arial"/>
+              </a:rPr>
               <a:t xml:space="preserve">Selecting tests from a diff is another candidate. Compare it against the full suite on retained changes before trusting the selection. Count missed regressions as well as runtime. Keep the full suite on a schedule. Cheap selection that skips the failing test has excellent unit economics right up to the incident.</a:t>
             </a:r>
             <a:endParaRPr lang="en-US" sz="1200"/>
@@ -933,7 +979,7 @@
                 <a:ea typeface="Arial"/>
                 <a:cs typeface="Arial"/>
               </a:rPr>
-              <a:t xml:space="preserve">Story: The repeated agent task you turned into a script. Bring the file and a case where it needed invalidating. Use measured browser-test costs only with run records.</a:t>
+              <a:t xml:space="preserve">Story: The repeated agent task you turned into a script. Bring the file and a case where it needed invalidating.</a:t>
             </a:r>
             <a:endParaRPr lang="en-US" sz="1200"/>
           </a:p>
@@ -2924,7 +2970,7 @@
                 <a:ea typeface="Arial"/>
                 <a:cs typeface="Arial"/>
               </a:rPr>
-              <a:t xml:space="preserve">Stage direction: Replay the opening scroll beside the distilled artifact. End there.</a:t>
+              <a:t xml:space="preserve">Stage direction: Replay the opening scroll beside the distilled artifact. End there. Stop talking.</a:t>
             </a:r>
             <a:endParaRPr lang="en-US" sz="1200"/>
           </a:p>
@@ -3265,7 +3311,7 @@
                 <a:ea typeface="Arial"/>
                 <a:cs typeface="Arial"/>
               </a:rPr>
-              <a:t xml:space="preserve">Your logs are a roadmap nobody reads</a:t>
+              <a:t xml:space="preserve">Nobody reads the scroll</a:t>
             </a:r>
             <a:endParaRPr lang="en-US" sz="1200"/>
           </a:p>
@@ -3472,7 +3518,7 @@
                 <a:ea typeface="Arial"/>
                 <a:cs typeface="Arial"/>
               </a:rPr>
-              <a:t xml:space="preserve">This talk owns the offline improvement loop, including the people reviewing its output. The examples are teaching fixtures until I attach a production record. Runtime recovery belongs to Adaptive, agentic apps.</a:t>
+              <a:t xml:space="preserve">This talk owns the offline improvement loop, including the people reviewing its output. The examples are teaching fixtures until I attach a production record. Runtime recovery, and how much authority a running agent earns for itself, belongs to Adaptive, agentic apps.</a:t>
             </a:r>
             <a:endParaRPr lang="en-US" sz="1200"/>
           </a:p>
@@ -3518,7 +3564,7 @@
                 <a:ea typeface="Arial"/>
                 <a:cs typeface="Arial"/>
               </a:rPr>
-              <a:t xml:space="preserve">There is a name for training people to ignore the channel that is supposed to warn them. Alert fatigue. Cvach reviewed it in clinical monitoring. I am borrowing the mechanism, not claiming a hospital study measured your on-call rotation. If our new agent creates a ticket for every log line, we have automated the thing that made the logs unreadable.</a:t>
+              <a:t xml:space="preserve">There is a name for training people to ignore the channel that is supposed to warn them. Alert fatigue. Cvach measured it on hospital monitors. Your pager is the same instrument. If our new agent creates a ticket for every log line, we have automated the thing that made the logs unreadable.</a:t>
             </a:r>
             <a:endParaRPr lang="en-US" sz="1200"/>
           </a:p>
@@ -4434,7 +4480,7 @@
                 <a:ea typeface="Arial"/>
                 <a:cs typeface="Arial"/>
               </a:rPr>
-              <a:t xml:space="preserve">An agent reading everything writes you a summary of the noise. Pick one failure class. If the class turns out to contain three different mechanisms, split it. That discovery is useful work.</a:t>
+              <a:t xml:space="preserve">The assistant with access to everything is coming anyway, and I am not arguing against it. This loop is one job with a countable tool list. An agent reading everything writes you a summary of the noise. Pick one failure class. If the class turns out to contain three different mechanisms, split it. That discovery is useful work.</a:t>
             </a:r>
             <a:endParaRPr lang="en-US" sz="1200"/>
           </a:p>
@@ -5693,7 +5739,7 @@
                 <a:ea typeface="Arial"/>
                 <a:cs typeface="Arial"/>
               </a:rPr>
-              <a:t xml:space="preserve">Diane Vaughan called the organizational pattern normalization of deviance. Her Challenger analysis shows how repeated acceptance of anomalies made them ordinary. Our application is narrower: a repair loop needs evidence that the defect is gone, because successful workarounds are very persuasive evidence of the wrong thing.</a:t>
+              <a:t xml:space="preserve">Diane Vaughan called the organizational pattern normalization of deviance. Her Challenger analysis shows how repeated acceptance of anomalies made them ordinary. A repair loop needs evidence that the defect is gone. Successful workarounds are very persuasive evidence of the wrong thing.</a:t>
             </a:r>
             <a:endParaRPr lang="en-US" sz="1200"/>
           </a:p>
@@ -5944,7 +5990,7 @@
                 <a:ea typeface="Arial"/>
                 <a:cs typeface="Arial"/>
               </a:rPr>
-              <a:t xml:space="preserve">From tags to tickets and PRs</a:t>
+              <a:t xml:space="preserve">Tickets are cheap. Review is not.</a:t>
             </a:r>
             <a:endParaRPr lang="en-US" sz="1200"/>
           </a:p>
@@ -8607,6 +8653,75 @@
             </a:r>
             <a:endParaRPr lang="en-US" sz="1500"/>
           </a:p>
+          <a:p>
+            <a:pPr marL="0" indent="0">
+              <a:lnSpc>
+                <a:spcPts val="1950"/>
+              </a:lnSpc>
+              <a:spcAft>
+                <a:spcPts val="0"/>
+              </a:spcAft>
+              <a:buNone/>
+            </a:pPr>
+            <a:r>
+              <a:rPr lang="en-US" sz="1500" b="0">
+                <a:solidFill>
+                  <a:srgbClr val="202B33"/>
+                </a:solidFill>
+                <a:latin typeface="Arial"/>
+                <a:ea typeface="Arial"/>
+                <a:cs typeface="Arial"/>
+              </a:rPr>
+              <a:t xml:space="preserve">to turn a repeated task into a file. The</a:t>
+            </a:r>
+            <a:endParaRPr lang="en-US" sz="1500"/>
+          </a:p>
+          <a:p>
+            <a:pPr marL="0" indent="0">
+              <a:lnSpc>
+                <a:spcPts val="1950"/>
+              </a:lnSpc>
+              <a:spcAft>
+                <a:spcPts val="0"/>
+              </a:spcAft>
+              <a:buNone/>
+            </a:pPr>
+            <a:r>
+              <a:rPr lang="en-US" sz="1500" b="0">
+                <a:solidFill>
+                  <a:srgbClr val="202B33"/>
+                </a:solidFill>
+                <a:latin typeface="Arial"/>
+                <a:ea typeface="Arial"/>
+                <a:cs typeface="Arial"/>
+              </a:rPr>
+              <a:t xml:space="preserve">output gets reviewed, tested, versioned,</a:t>
+            </a:r>
+            <a:endParaRPr lang="en-US" sz="1500"/>
+          </a:p>
+          <a:p>
+            <a:pPr marL="0" indent="0">
+              <a:lnSpc>
+                <a:spcPts val="1950"/>
+              </a:lnSpc>
+              <a:spcAft>
+                <a:spcPts val="0"/>
+              </a:spcAft>
+              <a:buNone/>
+            </a:pPr>
+            <a:r>
+              <a:rPr lang="en-US" sz="1500" b="0">
+                <a:solidFill>
+                  <a:srgbClr val="202B33"/>
+                </a:solidFill>
+                <a:latin typeface="Arial"/>
+                <a:ea typeface="Arial"/>
+                <a:cs typeface="Arial"/>
+              </a:rPr>
+              <a:t xml:space="preserve">and scheduled. When the page or the log</a:t>
+            </a:r>
+            <a:endParaRPr lang="en-US" sz="1500"/>
+          </a:p>
         </p:txBody>
       </p:sp>
       <p:sp>
@@ -8652,76 +8767,145 @@
                 <a:ea typeface="Arial"/>
                 <a:cs typeface="Arial"/>
               </a:rPr>
-              <a:t xml:space="preserve">to turn a repeated task into a file. The</a:t>
-            </a:r>
-            <a:endParaRPr lang="en-US" sz="1500"/>
-          </a:p>
-          <a:p>
-            <a:pPr marL="0" indent="0">
-              <a:lnSpc>
-                <a:spcPts val="1950"/>
-              </a:lnSpc>
-              <a:spcAft>
-                <a:spcPts val="0"/>
-              </a:spcAft>
-              <a:buNone/>
-            </a:pPr>
-            <a:r>
-              <a:rPr lang="en-US" sz="1500" b="0">
-                <a:solidFill>
-                  <a:srgbClr val="202B33"/>
-                </a:solidFill>
-                <a:latin typeface="Arial"/>
-                <a:ea typeface="Arial"/>
-                <a:cs typeface="Arial"/>
-              </a:rPr>
-              <a:t xml:space="preserve">output gets reviewed, tested, versioned,</a:t>
-            </a:r>
-            <a:endParaRPr lang="en-US" sz="1500"/>
-          </a:p>
-          <a:p>
-            <a:pPr marL="0" indent="0">
-              <a:lnSpc>
-                <a:spcPts val="1950"/>
-              </a:lnSpc>
-              <a:spcAft>
-                <a:spcPts val="0"/>
-              </a:spcAft>
-              <a:buNone/>
-            </a:pPr>
-            <a:r>
-              <a:rPr lang="en-US" sz="1500" b="0">
-                <a:solidFill>
-                  <a:srgbClr val="202B33"/>
-                </a:solidFill>
-                <a:latin typeface="Arial"/>
-                <a:ea typeface="Arial"/>
-                <a:cs typeface="Arial"/>
-              </a:rPr>
-              <a:t xml:space="preserve">and scheduled. When the page or the log</a:t>
-            </a:r>
-            <a:endParaRPr lang="en-US" sz="1500"/>
-          </a:p>
-          <a:p>
-            <a:pPr marL="0" indent="0">
-              <a:lnSpc>
-                <a:spcPts val="1950"/>
-              </a:lnSpc>
-              <a:spcAft>
-                <a:spcPts val="0"/>
-              </a:spcAft>
-              <a:buNone/>
-            </a:pPr>
-            <a:r>
-              <a:rPr lang="en-US" sz="1500" b="0">
-                <a:solidFill>
-                  <a:srgbClr val="202B33"/>
-                </a:solidFill>
-                <a:latin typeface="Arial"/>
-                <a:ea typeface="Arial"/>
-                <a:cs typeface="Arial"/>
-              </a:rPr>
               <a:t xml:space="preserve">schema changes, invalidate it.</a:t>
+            </a:r>
+            <a:endParaRPr lang="en-US" sz="1500"/>
+          </a:p>
+          <a:p>
+            <a:pPr marL="0" indent="0">
+              <a:lnSpc>
+                <a:spcPts val="1950"/>
+              </a:lnSpc>
+              <a:spcAft>
+                <a:spcPts val="0"/>
+              </a:spcAft>
+              <a:buNone/>
+            </a:pPr>
+            <a:r>
+              <a:rPr lang="en-US" sz="1500" b="0">
+                <a:solidFill>
+                  <a:srgbClr val="202B33"/>
+                </a:solidFill>
+                <a:latin typeface="Arial"/>
+                <a:ea typeface="Arial"/>
+                <a:cs typeface="Arial"/>
+              </a:rPr>
+              <a:t xml:space="preserve"/>
+            </a:r>
+            <a:endParaRPr lang="en-US" sz="1500"/>
+          </a:p>
+          <a:p>
+            <a:pPr marL="0" indent="0">
+              <a:lnSpc>
+                <a:spcPts val="1950"/>
+              </a:lnSpc>
+              <a:spcAft>
+                <a:spcPts val="0"/>
+              </a:spcAft>
+              <a:buNone/>
+            </a:pPr>
+            <a:r>
+              <a:rPr lang="en-US" sz="1500" b="0">
+                <a:solidFill>
+                  <a:srgbClr val="202B33"/>
+                </a:solidFill>
+                <a:latin typeface="Arial"/>
+                <a:ea typeface="Arial"/>
+                <a:cs typeface="Arial"/>
+              </a:rPr>
+              <a:t xml:space="preserve">This is where Adaptive, agentic apps hands</a:t>
+            </a:r>
+            <a:endParaRPr lang="en-US" sz="1500"/>
+          </a:p>
+          <a:p>
+            <a:pPr marL="0" indent="0">
+              <a:lnSpc>
+                <a:spcPts val="1950"/>
+              </a:lnSpc>
+              <a:spcAft>
+                <a:spcPts val="0"/>
+              </a:spcAft>
+              <a:buNone/>
+            </a:pPr>
+            <a:r>
+              <a:rPr lang="en-US" sz="1500" b="0">
+                <a:solidFill>
+                  <a:srgbClr val="202B33"/>
+                </a:solidFill>
+                <a:latin typeface="Arial"/>
+                <a:ea typeface="Arial"/>
+                <a:cs typeface="Arial"/>
+              </a:rPr>
+              <a:t xml:space="preserve">work back. A runtime agent earns its own</a:t>
+            </a:r>
+            <a:endParaRPr lang="en-US" sz="1500"/>
+          </a:p>
+          <a:p>
+            <a:pPr marL="0" indent="0">
+              <a:lnSpc>
+                <a:spcPts val="1950"/>
+              </a:lnSpc>
+              <a:spcAft>
+                <a:spcPts val="0"/>
+              </a:spcAft>
+              <a:buNone/>
+            </a:pPr>
+            <a:r>
+              <a:rPr lang="en-US" sz="1500" b="0">
+                <a:solidFill>
+                  <a:srgbClr val="202B33"/>
+                </a:solidFill>
+                <a:latin typeface="Arial"/>
+                <a:ea typeface="Arial"/>
+                <a:cs typeface="Arial"/>
+              </a:rPr>
+              <a:t xml:space="preserve">authority there; the compiled procedure it</a:t>
+            </a:r>
+            <a:endParaRPr lang="en-US" sz="1500"/>
+          </a:p>
+          <a:p>
+            <a:pPr marL="0" indent="0">
+              <a:lnSpc>
+                <a:spcPts val="1950"/>
+              </a:lnSpc>
+              <a:spcAft>
+                <a:spcPts val="0"/>
+              </a:spcAft>
+              <a:buNone/>
+            </a:pPr>
+            <a:r>
+              <a:rPr lang="en-US" sz="1500" b="0">
+                <a:solidFill>
+                  <a:srgbClr val="202B33"/>
+                </a:solidFill>
+                <a:latin typeface="Arial"/>
+                <a:ea typeface="Arial"/>
+                <a:cs typeface="Arial"/>
+              </a:rPr>
+              <a:t xml:space="preserve">keeps reusing gets evaluated here, offline,</a:t>
+            </a:r>
+            <a:endParaRPr lang="en-US" sz="1500"/>
+          </a:p>
+          <a:p>
+            <a:pPr marL="0" indent="0">
+              <a:lnSpc>
+                <a:spcPts val="1950"/>
+              </a:lnSpc>
+              <a:spcAft>
+                <a:spcPts val="0"/>
+              </a:spcAft>
+              <a:buNone/>
+            </a:pPr>
+            <a:r>
+              <a:rPr lang="en-US" sz="1500" b="0">
+                <a:solidFill>
+                  <a:srgbClr val="202B33"/>
+                </a:solidFill>
+                <a:latin typeface="Arial"/>
+                <a:ea typeface="Arial"/>
+                <a:cs typeface="Arial"/>
+              </a:rPr>
+              <a:t xml:space="preserve">like any other change.</a:t>
             </a:r>
             <a:endParaRPr lang="en-US" sz="1500"/>
           </a:p>
@@ -13856,7 +14040,7 @@
                 <a:ea typeface="Arial"/>
                 <a:cs typeface="Arial"/>
               </a:rPr>
-              <a:t xml:space="preserve">Your logs are a roadmap nobody reads</a:t>
+              <a:t xml:space="preserve">Nobody reads the scroll</a:t>
             </a:r>
             <a:endParaRPr lang="en-US" sz="2550"/>
           </a:p>
@@ -14299,7 +14483,53 @@
                 <a:ea typeface="Arial"/>
                 <a:cs typeface="Arial"/>
               </a:rPr>
-              <a:t xml:space="preserve">recovery belongs to Adaptive, agentic apps.</a:t>
+              <a:t xml:space="preserve">recovery, and how much authority a running</a:t>
+            </a:r>
+            <a:endParaRPr lang="en-US" sz="1500"/>
+          </a:p>
+          <a:p>
+            <a:pPr marL="0" indent="0">
+              <a:lnSpc>
+                <a:spcPts val="1950"/>
+              </a:lnSpc>
+              <a:spcAft>
+                <a:spcPts val="0"/>
+              </a:spcAft>
+              <a:buNone/>
+            </a:pPr>
+            <a:r>
+              <a:rPr lang="en-US" sz="1500" b="0">
+                <a:solidFill>
+                  <a:srgbClr val="202B33"/>
+                </a:solidFill>
+                <a:latin typeface="Arial"/>
+                <a:ea typeface="Arial"/>
+                <a:cs typeface="Arial"/>
+              </a:rPr>
+              <a:t xml:space="preserve">agent earns for itself, belongs to</a:t>
+            </a:r>
+            <a:endParaRPr lang="en-US" sz="1500"/>
+          </a:p>
+          <a:p>
+            <a:pPr marL="0" indent="0">
+              <a:lnSpc>
+                <a:spcPts val="1950"/>
+              </a:lnSpc>
+              <a:spcAft>
+                <a:spcPts val="0"/>
+              </a:spcAft>
+              <a:buNone/>
+            </a:pPr>
+            <a:r>
+              <a:rPr lang="en-US" sz="1500" b="0">
+                <a:solidFill>
+                  <a:srgbClr val="202B33"/>
+                </a:solidFill>
+                <a:latin typeface="Arial"/>
+                <a:ea typeface="Arial"/>
+                <a:cs typeface="Arial"/>
+              </a:rPr>
+              <a:t xml:space="preserve">Adaptive, agentic apps.</a:t>
             </a:r>
             <a:endParaRPr lang="en-US" sz="1500"/>
           </a:p>
@@ -14391,145 +14621,122 @@
                 <a:ea typeface="Arial"/>
                 <a:cs typeface="Arial"/>
               </a:rPr>
-              <a:t xml:space="preserve">them. Alert fatigue. Cvach reviewed it in</a:t>
-            </a:r>
-            <a:endParaRPr lang="en-US" sz="1500"/>
-          </a:p>
-          <a:p>
-            <a:pPr marL="0" indent="0">
-              <a:lnSpc>
-                <a:spcPts val="1950"/>
-              </a:lnSpc>
-              <a:spcAft>
-                <a:spcPts val="0"/>
-              </a:spcAft>
-              <a:buNone/>
-            </a:pPr>
-            <a:r>
-              <a:rPr lang="en-US" sz="1500" b="0">
-                <a:solidFill>
-                  <a:srgbClr val="202B33"/>
-                </a:solidFill>
-                <a:latin typeface="Arial"/>
-                <a:ea typeface="Arial"/>
-                <a:cs typeface="Arial"/>
-              </a:rPr>
-              <a:t xml:space="preserve">clinical monitoring. I am borrowing the</a:t>
-            </a:r>
-            <a:endParaRPr lang="en-US" sz="1500"/>
-          </a:p>
-          <a:p>
-            <a:pPr marL="0" indent="0">
-              <a:lnSpc>
-                <a:spcPts val="1950"/>
-              </a:lnSpc>
-              <a:spcAft>
-                <a:spcPts val="0"/>
-              </a:spcAft>
-              <a:buNone/>
-            </a:pPr>
-            <a:r>
-              <a:rPr lang="en-US" sz="1500" b="0">
-                <a:solidFill>
-                  <a:srgbClr val="202B33"/>
-                </a:solidFill>
-                <a:latin typeface="Arial"/>
-                <a:ea typeface="Arial"/>
-                <a:cs typeface="Arial"/>
-              </a:rPr>
-              <a:t xml:space="preserve">mechanism, not claiming a hospital study</a:t>
-            </a:r>
-            <a:endParaRPr lang="en-US" sz="1500"/>
-          </a:p>
-          <a:p>
-            <a:pPr marL="0" indent="0">
-              <a:lnSpc>
-                <a:spcPts val="1950"/>
-              </a:lnSpc>
-              <a:spcAft>
-                <a:spcPts val="0"/>
-              </a:spcAft>
-              <a:buNone/>
-            </a:pPr>
-            <a:r>
-              <a:rPr lang="en-US" sz="1500" b="0">
-                <a:solidFill>
-                  <a:srgbClr val="202B33"/>
-                </a:solidFill>
-                <a:latin typeface="Arial"/>
-                <a:ea typeface="Arial"/>
-                <a:cs typeface="Arial"/>
-              </a:rPr>
-              <a:t xml:space="preserve">measured your on-call rotation. If our new</a:t>
-            </a:r>
-            <a:endParaRPr lang="en-US" sz="1500"/>
-          </a:p>
-          <a:p>
-            <a:pPr marL="0" indent="0">
-              <a:lnSpc>
-                <a:spcPts val="1950"/>
-              </a:lnSpc>
-              <a:spcAft>
-                <a:spcPts val="0"/>
-              </a:spcAft>
-              <a:buNone/>
-            </a:pPr>
-            <a:r>
-              <a:rPr lang="en-US" sz="1500" b="0">
-                <a:solidFill>
-                  <a:srgbClr val="202B33"/>
-                </a:solidFill>
-                <a:latin typeface="Arial"/>
-                <a:ea typeface="Arial"/>
-                <a:cs typeface="Arial"/>
-              </a:rPr>
-              <a:t xml:space="preserve">agent creates a ticket for every log line,</a:t>
-            </a:r>
-            <a:endParaRPr lang="en-US" sz="1500"/>
-          </a:p>
-          <a:p>
-            <a:pPr marL="0" indent="0">
-              <a:lnSpc>
-                <a:spcPts val="1950"/>
-              </a:lnSpc>
-              <a:spcAft>
-                <a:spcPts val="0"/>
-              </a:spcAft>
-              <a:buNone/>
-            </a:pPr>
-            <a:r>
-              <a:rPr lang="en-US" sz="1500" b="0">
-                <a:solidFill>
-                  <a:srgbClr val="202B33"/>
-                </a:solidFill>
-                <a:latin typeface="Arial"/>
-                <a:ea typeface="Arial"/>
-                <a:cs typeface="Arial"/>
-              </a:rPr>
-              <a:t xml:space="preserve">we have automated the thing that made the</a:t>
-            </a:r>
-            <a:endParaRPr lang="en-US" sz="1500"/>
-          </a:p>
-          <a:p>
-            <a:pPr marL="0" indent="0">
-              <a:lnSpc>
-                <a:spcPts val="1950"/>
-              </a:lnSpc>
-              <a:spcAft>
-                <a:spcPts val="0"/>
-              </a:spcAft>
-              <a:buNone/>
-            </a:pPr>
-            <a:r>
-              <a:rPr lang="en-US" sz="1500" b="0">
-                <a:solidFill>
-                  <a:srgbClr val="202B33"/>
-                </a:solidFill>
-                <a:latin typeface="Arial"/>
-                <a:ea typeface="Arial"/>
-                <a:cs typeface="Arial"/>
-              </a:rPr>
-              <a:t xml:space="preserve">logs unreadable.</a:t>
+              <a:t xml:space="preserve">them. Alert fatigue. Cvach measured it on</a:t>
+            </a:r>
+            <a:endParaRPr lang="en-US" sz="1500"/>
+          </a:p>
+          <a:p>
+            <a:pPr marL="0" indent="0">
+              <a:lnSpc>
+                <a:spcPts val="1950"/>
+              </a:lnSpc>
+              <a:spcAft>
+                <a:spcPts val="0"/>
+              </a:spcAft>
+              <a:buNone/>
+            </a:pPr>
+            <a:r>
+              <a:rPr lang="en-US" sz="1500" b="0">
+                <a:solidFill>
+                  <a:srgbClr val="202B33"/>
+                </a:solidFill>
+                <a:latin typeface="Arial"/>
+                <a:ea typeface="Arial"/>
+                <a:cs typeface="Arial"/>
+              </a:rPr>
+              <a:t xml:space="preserve">hospital monitors. Your pager is the same</a:t>
+            </a:r>
+            <a:endParaRPr lang="en-US" sz="1500"/>
+          </a:p>
+          <a:p>
+            <a:pPr marL="0" indent="0">
+              <a:lnSpc>
+                <a:spcPts val="1950"/>
+              </a:lnSpc>
+              <a:spcAft>
+                <a:spcPts val="0"/>
+              </a:spcAft>
+              <a:buNone/>
+            </a:pPr>
+            <a:r>
+              <a:rPr lang="en-US" sz="1500" b="0">
+                <a:solidFill>
+                  <a:srgbClr val="202B33"/>
+                </a:solidFill>
+                <a:latin typeface="Arial"/>
+                <a:ea typeface="Arial"/>
+                <a:cs typeface="Arial"/>
+              </a:rPr>
+              <a:t xml:space="preserve">instrument. If our new agent creates a</a:t>
+            </a:r>
+            <a:endParaRPr lang="en-US" sz="1500"/>
+          </a:p>
+          <a:p>
+            <a:pPr marL="0" indent="0">
+              <a:lnSpc>
+                <a:spcPts val="1950"/>
+              </a:lnSpc>
+              <a:spcAft>
+                <a:spcPts val="0"/>
+              </a:spcAft>
+              <a:buNone/>
+            </a:pPr>
+            <a:r>
+              <a:rPr lang="en-US" sz="1500" b="0">
+                <a:solidFill>
+                  <a:srgbClr val="202B33"/>
+                </a:solidFill>
+                <a:latin typeface="Arial"/>
+                <a:ea typeface="Arial"/>
+                <a:cs typeface="Arial"/>
+              </a:rPr>
+              <a:t xml:space="preserve">ticket for every log line, we have</a:t>
+            </a:r>
+            <a:endParaRPr lang="en-US" sz="1500"/>
+          </a:p>
+          <a:p>
+            <a:pPr marL="0" indent="0">
+              <a:lnSpc>
+                <a:spcPts val="1950"/>
+              </a:lnSpc>
+              <a:spcAft>
+                <a:spcPts val="0"/>
+              </a:spcAft>
+              <a:buNone/>
+            </a:pPr>
+            <a:r>
+              <a:rPr lang="en-US" sz="1500" b="0">
+                <a:solidFill>
+                  <a:srgbClr val="202B33"/>
+                </a:solidFill>
+                <a:latin typeface="Arial"/>
+                <a:ea typeface="Arial"/>
+                <a:cs typeface="Arial"/>
+              </a:rPr>
+              <a:t xml:space="preserve">automated the thing that made the logs</a:t>
+            </a:r>
+            <a:endParaRPr lang="en-US" sz="1500"/>
+          </a:p>
+          <a:p>
+            <a:pPr marL="0" indent="0">
+              <a:lnSpc>
+                <a:spcPts val="1950"/>
+              </a:lnSpc>
+              <a:spcAft>
+                <a:spcPts val="0"/>
+              </a:spcAft>
+              <a:buNone/>
+            </a:pPr>
+            <a:r>
+              <a:rPr lang="en-US" sz="1500" b="0">
+                <a:solidFill>
+                  <a:srgbClr val="202B33"/>
+                </a:solidFill>
+                <a:latin typeface="Arial"/>
+                <a:ea typeface="Arial"/>
+                <a:cs typeface="Arial"/>
+              </a:rPr>
+              <a:t xml:space="preserve">unreadable.</a:t>
             </a:r>
             <a:endParaRPr lang="en-US" sz="1500"/>
           </a:p>
@@ -15860,6 +16067,52 @@
             </a:r>
             <a:endParaRPr lang="en-US" sz="1200"/>
           </a:p>
+          <a:p>
+            <a:pPr marL="0" indent="0">
+              <a:lnSpc>
+                <a:spcPts val="1575"/>
+              </a:lnSpc>
+              <a:spcAft>
+                <a:spcPts val="0"/>
+              </a:spcAft>
+              <a:buNone/>
+            </a:pPr>
+            <a:r>
+              <a:rPr lang="en-US" sz="1200" b="0">
+                <a:solidFill>
+                  <a:srgbClr val="202B33"/>
+                </a:solidFill>
+                <a:latin typeface="Arial"/>
+                <a:ea typeface="Arial"/>
+                <a:cs typeface="Arial"/>
+              </a:rPr>
+              <a:t xml:space="preserve">Add the integration that answers the next question.</a:t>
+            </a:r>
+            <a:endParaRPr lang="en-US" sz="1200"/>
+          </a:p>
+          <a:p>
+            <a:pPr marL="0" indent="0">
+              <a:lnSpc>
+                <a:spcPts val="1575"/>
+              </a:lnSpc>
+              <a:spcAft>
+                <a:spcPts val="0"/>
+              </a:spcAft>
+              <a:buNone/>
+            </a:pPr>
+            <a:r>
+              <a:rPr lang="en-US" sz="1200" b="0">
+                <a:solidFill>
+                  <a:srgbClr val="202B33"/>
+                </a:solidFill>
+                <a:latin typeface="Arial"/>
+                <a:ea typeface="Arial"/>
+                <a:cs typeface="Arial"/>
+              </a:rPr>
+              <a:t xml:space="preserve">Read access to code does not require write access to</a:t>
+            </a:r>
+            <a:endParaRPr lang="en-US" sz="1200"/>
+          </a:p>
         </p:txBody>
       </p:sp>
       <p:sp>
@@ -15905,7 +16158,7 @@
                 <a:ea typeface="Arial"/>
                 <a:cs typeface="Arial"/>
               </a:rPr>
-              <a:t xml:space="preserve">Add the integration that answers the next question.</a:t>
+              <a:t xml:space="preserve">production. Looking at queue depth does not require</a:t>
             </a:r>
             <a:endParaRPr lang="en-US" sz="1200"/>
           </a:p>
@@ -15928,7 +16181,7 @@
                 <a:ea typeface="Arial"/>
                 <a:cs typeface="Arial"/>
               </a:rPr>
-              <a:t xml:space="preserve">Read access to code does not require write access to</a:t>
+              <a:t xml:space="preserve">permission to resize the cluster. Access is a set of</a:t>
             </a:r>
             <a:endParaRPr lang="en-US" sz="1200"/>
           </a:p>
@@ -15951,7 +16204,7 @@
                 <a:ea typeface="Arial"/>
                 <a:cs typeface="Arial"/>
               </a:rPr>
-              <a:t xml:space="preserve">production. Looking at queue depth does not require</a:t>
+              <a:t xml:space="preserve">individual grants, not a graduation ceremony.</a:t>
             </a:r>
             <a:endParaRPr lang="en-US" sz="1200"/>
           </a:p>
@@ -15974,7 +16227,7 @@
                 <a:ea typeface="Arial"/>
                 <a:cs typeface="Arial"/>
               </a:rPr>
-              <a:t xml:space="preserve">permission to resize the cluster. Access is a set of</a:t>
+              <a:t xml:space="preserve"/>
             </a:r>
             <a:endParaRPr lang="en-US" sz="1200"/>
           </a:p>
@@ -15997,7 +16250,7 @@
                 <a:ea typeface="Arial"/>
                 <a:cs typeface="Arial"/>
               </a:rPr>
-              <a:t xml:space="preserve">individual grants, not a graduation ceremony.</a:t>
+              <a:t xml:space="preserve">The assistant with access to everything is coming</a:t>
             </a:r>
             <a:endParaRPr lang="en-US" sz="1200"/>
           </a:p>
@@ -16020,7 +16273,7 @@
                 <a:ea typeface="Arial"/>
                 <a:cs typeface="Arial"/>
               </a:rPr>
-              <a:t xml:space="preserve"/>
+              <a:t xml:space="preserve">anyway, and I am not arguing against it. This loop is</a:t>
             </a:r>
             <a:endParaRPr lang="en-US" sz="1200"/>
           </a:p>
@@ -16043,7 +16296,7 @@
                 <a:ea typeface="Arial"/>
                 <a:cs typeface="Arial"/>
               </a:rPr>
-              <a:t xml:space="preserve">An agent reading everything writes you a summary of</a:t>
+              <a:t xml:space="preserve">one job with a countable tool list. An agent reading</a:t>
             </a:r>
             <a:endParaRPr lang="en-US" sz="1200"/>
           </a:p>
@@ -16066,7 +16319,7 @@
                 <a:ea typeface="Arial"/>
                 <a:cs typeface="Arial"/>
               </a:rPr>
-              <a:t xml:space="preserve">the noise. Pick one failure class. If the class turns</a:t>
+              <a:t xml:space="preserve">everything writes you a summary of the noise. Pick</a:t>
             </a:r>
             <a:endParaRPr lang="en-US" sz="1200"/>
           </a:p>
@@ -16089,7 +16342,7 @@
                 <a:ea typeface="Arial"/>
                 <a:cs typeface="Arial"/>
               </a:rPr>
-              <a:t xml:space="preserve">out to contain three different mechanisms, split it.</a:t>
+              <a:t xml:space="preserve">one failure class. If the class turns out to contain</a:t>
             </a:r>
             <a:endParaRPr lang="en-US" sz="1200"/>
           </a:p>
@@ -16112,7 +16365,30 @@
                 <a:ea typeface="Arial"/>
                 <a:cs typeface="Arial"/>
               </a:rPr>
-              <a:t xml:space="preserve">That discovery is useful work.</a:t>
+              <a:t xml:space="preserve">three different mechanisms, split it. That discovery</a:t>
+            </a:r>
+            <a:endParaRPr lang="en-US" sz="1200"/>
+          </a:p>
+          <a:p>
+            <a:pPr marL="0" indent="0">
+              <a:lnSpc>
+                <a:spcPts val="1575"/>
+              </a:lnSpc>
+              <a:spcAft>
+                <a:spcPts val="0"/>
+              </a:spcAft>
+              <a:buNone/>
+            </a:pPr>
+            <a:r>
+              <a:rPr lang="en-US" sz="1200" b="0">
+                <a:solidFill>
+                  <a:srgbClr val="202B33"/>
+                </a:solidFill>
+                <a:latin typeface="Arial"/>
+                <a:ea typeface="Arial"/>
+                <a:cs typeface="Arial"/>
+              </a:rPr>
+              <a:t xml:space="preserve">is useful work.</a:t>
             </a:r>
             <a:endParaRPr lang="en-US" sz="1200"/>
           </a:p>
@@ -18505,76 +18781,76 @@
                 <a:ea typeface="Arial"/>
                 <a:cs typeface="Arial"/>
               </a:rPr>
-              <a:t xml:space="preserve">Our application is narrower: a repair loop</a:t>
-            </a:r>
-            <a:endParaRPr lang="en-US" sz="1500"/>
-          </a:p>
-          <a:p>
-            <a:pPr marL="0" indent="0">
-              <a:lnSpc>
-                <a:spcPts val="1950"/>
-              </a:lnSpc>
-              <a:spcAft>
-                <a:spcPts val="0"/>
-              </a:spcAft>
-              <a:buNone/>
-            </a:pPr>
-            <a:r>
-              <a:rPr lang="en-US" sz="1500" b="0">
-                <a:solidFill>
-                  <a:srgbClr val="202B33"/>
-                </a:solidFill>
-                <a:latin typeface="Arial"/>
-                <a:ea typeface="Arial"/>
-                <a:cs typeface="Arial"/>
-              </a:rPr>
-              <a:t xml:space="preserve">needs evidence that the defect is gone,</a:t>
-            </a:r>
-            <a:endParaRPr lang="en-US" sz="1500"/>
-          </a:p>
-          <a:p>
-            <a:pPr marL="0" indent="0">
-              <a:lnSpc>
-                <a:spcPts val="1950"/>
-              </a:lnSpc>
-              <a:spcAft>
-                <a:spcPts val="0"/>
-              </a:spcAft>
-              <a:buNone/>
-            </a:pPr>
-            <a:r>
-              <a:rPr lang="en-US" sz="1500" b="0">
-                <a:solidFill>
-                  <a:srgbClr val="202B33"/>
-                </a:solidFill>
-                <a:latin typeface="Arial"/>
-                <a:ea typeface="Arial"/>
-                <a:cs typeface="Arial"/>
-              </a:rPr>
-              <a:t xml:space="preserve">because successful workarounds are very</a:t>
-            </a:r>
-            <a:endParaRPr lang="en-US" sz="1500"/>
-          </a:p>
-          <a:p>
-            <a:pPr marL="0" indent="0">
-              <a:lnSpc>
-                <a:spcPts val="1950"/>
-              </a:lnSpc>
-              <a:spcAft>
-                <a:spcPts val="0"/>
-              </a:spcAft>
-              <a:buNone/>
-            </a:pPr>
-            <a:r>
-              <a:rPr lang="en-US" sz="1500" b="0">
-                <a:solidFill>
-                  <a:srgbClr val="202B33"/>
-                </a:solidFill>
-                <a:latin typeface="Arial"/>
-                <a:ea typeface="Arial"/>
-                <a:cs typeface="Arial"/>
-              </a:rPr>
-              <a:t xml:space="preserve">persuasive evidence of the wrong thing.</a:t>
+              <a:t xml:space="preserve">A repair loop needs evidence that the</a:t>
+            </a:r>
+            <a:endParaRPr lang="en-US" sz="1500"/>
+          </a:p>
+          <a:p>
+            <a:pPr marL="0" indent="0">
+              <a:lnSpc>
+                <a:spcPts val="1950"/>
+              </a:lnSpc>
+              <a:spcAft>
+                <a:spcPts val="0"/>
+              </a:spcAft>
+              <a:buNone/>
+            </a:pPr>
+            <a:r>
+              <a:rPr lang="en-US" sz="1500" b="0">
+                <a:solidFill>
+                  <a:srgbClr val="202B33"/>
+                </a:solidFill>
+                <a:latin typeface="Arial"/>
+                <a:ea typeface="Arial"/>
+                <a:cs typeface="Arial"/>
+              </a:rPr>
+              <a:t xml:space="preserve">defect is gone. Successful workarounds are</a:t>
+            </a:r>
+            <a:endParaRPr lang="en-US" sz="1500"/>
+          </a:p>
+          <a:p>
+            <a:pPr marL="0" indent="0">
+              <a:lnSpc>
+                <a:spcPts val="1950"/>
+              </a:lnSpc>
+              <a:spcAft>
+                <a:spcPts val="0"/>
+              </a:spcAft>
+              <a:buNone/>
+            </a:pPr>
+            <a:r>
+              <a:rPr lang="en-US" sz="1500" b="0">
+                <a:solidFill>
+                  <a:srgbClr val="202B33"/>
+                </a:solidFill>
+                <a:latin typeface="Arial"/>
+                <a:ea typeface="Arial"/>
+                <a:cs typeface="Arial"/>
+              </a:rPr>
+              <a:t xml:space="preserve">very persuasive evidence of the wrong</a:t>
+            </a:r>
+            <a:endParaRPr lang="en-US" sz="1500"/>
+          </a:p>
+          <a:p>
+            <a:pPr marL="0" indent="0">
+              <a:lnSpc>
+                <a:spcPts val="1950"/>
+              </a:lnSpc>
+              <a:spcAft>
+                <a:spcPts val="0"/>
+              </a:spcAft>
+              <a:buNone/>
+            </a:pPr>
+            <a:r>
+              <a:rPr lang="en-US" sz="1500" b="0">
+                <a:solidFill>
+                  <a:srgbClr val="202B33"/>
+                </a:solidFill>
+                <a:latin typeface="Arial"/>
+                <a:ea typeface="Arial"/>
+                <a:cs typeface="Arial"/>
+              </a:rPr>
+              <a:t xml:space="preserve">thing.</a:t>
             </a:r>
             <a:endParaRPr lang="en-US" sz="1500"/>
           </a:p>
@@ -18803,7 +19079,7 @@
                 <a:ea typeface="Arial"/>
                 <a:cs typeface="Arial"/>
               </a:rPr>
-              <a:t xml:space="preserve">From tags to tickets and PRs</a:t>
+              <a:t xml:space="preserve">Tickets are cheap. Review is not.</a:t>
             </a:r>
             <a:endParaRPr lang="en-US" sz="2550"/>
           </a:p>
